--- a/一生一芯 · 签到抽奖与交流群.pptx
+++ b/一生一芯 · 签到抽奖与交流群.pptx
@@ -10,7 +10,7 @@
   </p:notesMasterIdLst>
   <p:sldIdLst>
     <p:sldId id="258" r:id="rId4"/>
-    <p:sldId id="256" r:id="rId6"/>
+    <p:sldId id="259" r:id="rId6"/>
     <p:sldId id="257" r:id="rId7"/>
   </p:sldIdLst>
   <p:sldSz cx="12192000" cy="6858000"/>
@@ -844,102 +844,19 @@
       </p:grpSpPr>
       <p:sp>
         <p:nvSpPr>
-          <p:cNvPr id="2" name="Header Placeholder 1"/>
+          <p:cNvPr id="2" name="Slide Image Placeholder 1"/>
           <p:cNvSpPr>
             <a:spLocks noGrp="1"/>
-          </p:cNvSpPr>
-          <p:nvPr>
-            <p:ph type="hdr" sz="quarter"/>
-          </p:nvPr>
-        </p:nvSpPr>
-        <p:spPr>
-          <a:xfrm>
-            <a:off x="0" y="0"/>
-            <a:ext cx="3962400" cy="342900"/>
-          </a:xfrm>
-          <a:prstGeom prst="rect">
-            <a:avLst/>
-          </a:prstGeom>
-        </p:spPr>
-        <p:txBody>
-          <a:bodyPr vert="horz" lIns="91440" tIns="45720" rIns="91440" bIns="45720" rtlCol="0"/>
-          <a:lstStyle>
-            <a:lvl1pPr algn="l">
-              <a:defRPr sz="1200"/>
-            </a:lvl1pPr>
-          </a:lstStyle>
-          <a:p/>
-        </p:txBody>
-      </p:sp>
-      <p:sp>
-        <p:nvSpPr>
-          <p:cNvPr id="3" name="Date Placeholder 2"/>
-          <p:cNvSpPr>
-            <a:spLocks noGrp="1"/>
-          </p:cNvSpPr>
-          <p:nvPr>
-            <p:ph type="dt" idx="1"/>
-          </p:nvPr>
-        </p:nvSpPr>
-        <p:spPr>
-          <a:xfrm>
-            <a:off x="5180013" y="0"/>
-            <a:ext cx="3962400" cy="342900"/>
-          </a:xfrm>
-          <a:prstGeom prst="rect">
-            <a:avLst/>
-          </a:prstGeom>
-        </p:spPr>
-        <p:txBody>
-          <a:bodyPr vert="horz" lIns="91440" tIns="45720" rIns="91440" bIns="45720" rtlCol="0"/>
-          <a:lstStyle>
-            <a:lvl1pPr algn="r">
-              <a:defRPr sz="1200"/>
-            </a:lvl1pPr>
-          </a:lstStyle>
-          <a:p>
-            <a:r>
-              <a:rPr lang="cs-CZ" smtClean="0"/>
-              <a:t>1.7.2013</a:t>
-            </a:r>
-            <a:endParaRPr lang="cs-CZ" smtClean="0"/>
-          </a:p>
-        </p:txBody>
-      </p:sp>
-      <p:sp>
-        <p:nvSpPr>
-          <p:cNvPr id="4" name="Slide Image Placeholder 3"/>
-          <p:cNvSpPr>
-            <a:spLocks noGrp="1" noRot="1" noChangeAspect="1"/>
           </p:cNvSpPr>
           <p:nvPr>
             <p:ph type="sldImg" idx="2"/>
           </p:nvPr>
         </p:nvSpPr>
-        <p:spPr>
-          <a:xfrm>
-            <a:off x="2857500" y="512763"/>
-            <a:ext cx="3429000" cy="2566987"/>
-          </a:xfrm>
-          <a:prstGeom prst="rect">
-            <a:avLst/>
-          </a:prstGeom>
-          <a:noFill/>
-          <a:ln w="12700">
-            <a:solidFill>
-              <a:prstClr val="black"/>
-            </a:solidFill>
-          </a:ln>
-        </p:spPr>
-        <p:txBody>
-          <a:bodyPr vert="horz" lIns="91440" tIns="45720" rIns="91440" bIns="45720" rtlCol="0" anchor="ctr"/>
-          <a:lstStyle/>
-          <a:p/>
-        </p:txBody>
+        <p:spPr/>
       </p:sp>
       <p:sp>
         <p:nvSpPr>
-          <p:cNvPr id="5" name="Notes Placeholder 4"/>
+          <p:cNvPr id="3" name="Notes Placeholder 2"/>
           <p:cNvSpPr>
             <a:spLocks noGrp="1"/>
           </p:cNvSpPr>
@@ -947,59 +864,20 @@
             <p:ph type="body" sz="quarter" idx="3"/>
           </p:nvPr>
         </p:nvSpPr>
-        <p:spPr>
-          <a:xfrm>
-            <a:off x="914400" y="3251200"/>
-            <a:ext cx="7315200" cy="3081338"/>
-          </a:xfrm>
-          <a:prstGeom prst="rect">
-            <a:avLst/>
-          </a:prstGeom>
-        </p:spPr>
+        <p:spPr/>
         <p:txBody>
-          <a:bodyPr vert="horz" lIns="91440" tIns="45720" rIns="91440" bIns="45720" rtlCol="0" anchor="ctr"/>
-          <a:lstStyle>
-            <a:lvl1pPr algn="l">
-              <a:defRPr sz="1400" b="0" i="0" u="none" strike="noStrike"/>
-            </a:lvl1pPr>
-          </a:lstStyle>
+          <a:bodyPr/>
+          <a:lstStyle/>
           <a:p>
-            <a:pPr algn="l"/>
+            <a:r>
+              <a:t>会务专用：抽奖环节投屏页。左侧是签到二维码，右侧是奖品清单和特等奖大图。主持人现场抽奖，抽完在微信群/口头公布名单。奖品数量：雨伞1、帆布袋3、钥匙扣5、贴纸5。</a:t>
+            </a:r>
           </a:p>
         </p:txBody>
       </p:sp>
       <p:sp>
         <p:nvSpPr>
-          <p:cNvPr id="6" name="Footer Placeholder 5"/>
-          <p:cNvSpPr>
-            <a:spLocks noGrp="1"/>
-          </p:cNvSpPr>
-          <p:nvPr>
-            <p:ph type="ftr" sz="quarter" idx="4"/>
-          </p:nvPr>
-        </p:nvSpPr>
-        <p:spPr>
-          <a:xfrm>
-            <a:off x="0" y="6502400"/>
-            <a:ext cx="3962400" cy="341313"/>
-          </a:xfrm>
-          <a:prstGeom prst="rect">
-            <a:avLst/>
-          </a:prstGeom>
-        </p:spPr>
-        <p:txBody>
-          <a:bodyPr vert="horz" lIns="91440" tIns="45720" rIns="91440" bIns="45720" rtlCol="0" anchor="b"/>
-          <a:lstStyle>
-            <a:lvl1pPr algn="l">
-              <a:defRPr sz="1200"/>
-            </a:lvl1pPr>
-          </a:lstStyle>
-          <a:p/>
-        </p:txBody>
-      </p:sp>
-      <p:sp>
-        <p:nvSpPr>
-          <p:cNvPr id="7" name="Slide Number Placeholder 6"/>
+          <p:cNvPr id="4" name="Slide Number Placeholder 3"/>
           <p:cNvSpPr>
             <a:spLocks noGrp="1"/>
           </p:cNvSpPr>
@@ -1007,30 +885,7 @@
             <p:ph type="sldNum" sz="quarter" idx="5"/>
           </p:nvPr>
         </p:nvSpPr>
-        <p:spPr>
-          <a:xfrm>
-            <a:off x="5180013" y="6502400"/>
-            <a:ext cx="3962400" cy="341313"/>
-          </a:xfrm>
-          <a:prstGeom prst="rect">
-            <a:avLst/>
-          </a:prstGeom>
-        </p:spPr>
-        <p:txBody>
-          <a:bodyPr vert="horz" lIns="91440" tIns="45720" rIns="91440" bIns="45720" rtlCol="0" anchor="b"/>
-          <a:lstStyle>
-            <a:lvl1pPr algn="r">
-              <a:defRPr sz="1200"/>
-            </a:lvl1pPr>
-          </a:lstStyle>
-          <a:p>
-            <a:r>
-              <a:rPr lang="cs-CZ" smtClean="0"/>
-              <a:t>‹#›</a:t>
-            </a:r>
-            <a:endParaRPr lang="cs-CZ" smtClean="0"/>
-          </a:p>
-        </p:txBody>
+        <p:spPr/>
       </p:sp>
     </p:spTree>
   </p:cSld>
@@ -3397,6 +3252,109 @@
           <a:chExt cx="0" cy="0"/>
         </a:xfrm>
       </p:grpSpPr>
+    </p:spTree>
+  </p:cSld>
+  <p:clrMapOvr>
+    <a:masterClrMapping/>
+  </p:clrMapOvr>
+</p:sldLayout>
+</file>
+
+<file path=ppt/slideLayouts/slideLayout13.xml><?xml version="1.0" encoding="utf-8"?>
+<p:sldLayout xmlns:a="http://schemas.openxmlformats.org/drawingml/2006/main" xmlns:r="http://schemas.openxmlformats.org/officeDocument/2006/relationships" xmlns:p="http://schemas.openxmlformats.org/presentationml/2006/main" type="blank" preserve="1">
+  <p:cSld name="Blank">
+    <p:spTree>
+      <p:nvGrpSpPr>
+        <p:cNvPr id="1" name=""/>
+        <p:cNvGrpSpPr/>
+        <p:nvPr/>
+      </p:nvGrpSpPr>
+      <p:grpSpPr>
+        <a:xfrm>
+          <a:off x="0" y="0"/>
+          <a:ext cx="0" cy="0"/>
+          <a:chOff x="0" y="0"/>
+          <a:chExt cx="0" cy="0"/>
+        </a:xfrm>
+      </p:grpSpPr>
+      <p:sp>
+        <p:nvSpPr>
+          <p:cNvPr id="2" name="Date Placeholder 1"/>
+          <p:cNvSpPr>
+            <a:spLocks noGrp="1"/>
+          </p:cNvSpPr>
+          <p:nvPr>
+            <p:ph type="dt" sz="half" idx="10"/>
+          </p:nvPr>
+        </p:nvSpPr>
+        <p:spPr>
+          <a:xfrm>
+            <a:off x="457224" y="6356350"/>
+            <a:ext cx="2133711" cy="365125"/>
+          </a:xfrm>
+        </p:spPr>
+        <p:txBody>
+          <a:bodyPr/>
+          <a:lstStyle/>
+          <a:p>
+            <a:fld id="{5BCAD085-E8A6-8845-BD4E-CB4CCA059FC4}" type="datetimeFigureOut">
+              <a:rPr lang="en-US" smtClean="0"/>
+            </a:fld>
+            <a:endParaRPr lang="en-US"/>
+          </a:p>
+        </p:txBody>
+      </p:sp>
+      <p:sp>
+        <p:nvSpPr>
+          <p:cNvPr id="3" name="Footer Placeholder 2"/>
+          <p:cNvSpPr>
+            <a:spLocks noGrp="1"/>
+          </p:cNvSpPr>
+          <p:nvPr>
+            <p:ph type="ftr" sz="quarter" idx="11"/>
+          </p:nvPr>
+        </p:nvSpPr>
+        <p:spPr>
+          <a:xfrm>
+            <a:off x="3124363" y="6356350"/>
+            <a:ext cx="2895751" cy="365125"/>
+          </a:xfrm>
+        </p:spPr>
+        <p:txBody>
+          <a:bodyPr/>
+          <a:lstStyle/>
+          <a:p>
+            <a:endParaRPr lang="en-US"/>
+          </a:p>
+        </p:txBody>
+      </p:sp>
+      <p:sp>
+        <p:nvSpPr>
+          <p:cNvPr id="4" name="Slide Number Placeholder 3"/>
+          <p:cNvSpPr>
+            <a:spLocks noGrp="1"/>
+          </p:cNvSpPr>
+          <p:nvPr>
+            <p:ph type="sldNum" sz="quarter" idx="12"/>
+          </p:nvPr>
+        </p:nvSpPr>
+        <p:spPr>
+          <a:xfrm>
+            <a:off x="6553541" y="6356350"/>
+            <a:ext cx="2133711" cy="365125"/>
+          </a:xfrm>
+        </p:spPr>
+        <p:txBody>
+          <a:bodyPr/>
+          <a:lstStyle/>
+          <a:p>
+            <a:fld id="{C1FF6DA9-008F-8B48-92A6-B652298478BF}" type="slidenum">
+              <a:rPr lang="en-US" smtClean="0"/>
+            </a:fld>
+            <a:endParaRPr lang="en-US"/>
+          </a:p>
+        </p:txBody>
+      </p:sp>
     </p:spTree>
   </p:cSld>
   <p:clrMapOvr>
@@ -11299,6 +11257,7 @@
   <p:clrMap bg1="lt1" tx1="dk1" bg2="dk2" tx2="lt2" accent1="accent1" accent2="accent2" accent3="accent3" accent4="accent4" accent5="accent5" accent6="accent6" hlink="hlink" folHlink="folHlink"/>
   <p:sldLayoutIdLst>
     <p:sldLayoutId id="2147483661" r:id="rId1"/>
+    <p:sldLayoutId id="2147483662" r:id="rId2"/>
   </p:sldLayoutIdLst>
   <p:hf sldNum="0" hdr="0" ftr="0" dt="0"/>
   <p:txStyles>
@@ -12449,131 +12408,467 @@
 <file path=ppt/slides/slide2.xml><?xml version="1.0" encoding="utf-8"?>
 <p:sld xmlns:a="http://schemas.openxmlformats.org/drawingml/2006/main" xmlns:r="http://schemas.openxmlformats.org/officeDocument/2006/relationships" xmlns:p="http://schemas.openxmlformats.org/presentationml/2006/main">
   <p:cSld>
-    <p:bg>
-      <p:bgPr>
-        <a:solidFill>
-          <a:srgbClr val="0A1014">
-            <a:alpha val="100000"/>
-          </a:srgbClr>
-        </a:solidFill>
-        <a:effectLst/>
-      </p:bgPr>
-    </p:bg>
     <p:spTree>
       <p:nvGrpSpPr>
         <p:cNvPr id="1" name=""/>
         <p:cNvGrpSpPr/>
         <p:nvPr/>
       </p:nvGrpSpPr>
-      <p:grpSpPr>
-        <a:xfrm>
-          <a:off x="0" y="0"/>
-          <a:ext cx="0" cy="0"/>
-          <a:chOff x="0" y="0"/>
-          <a:chExt cx="0" cy="0"/>
-        </a:xfrm>
-      </p:grpSpPr>
+      <p:grpSpPr/>
       <p:sp>
         <p:nvSpPr>
-          <p:cNvPr id="2" name="AutoShape 2"/>
+          <p:cNvPr id="2" name="Rectangle 1"/>
+          <p:cNvSpPr/>
+          <p:nvPr/>
+        </p:nvSpPr>
+        <p:spPr>
+          <a:xfrm>
+            <a:off x="318" y="0"/>
+            <a:ext cx="12191969" cy="6858000"/>
+          </a:xfrm>
+          <a:prstGeom prst="rect">
+            <a:avLst/>
+          </a:prstGeom>
+          <a:gradFill rotWithShape="1">
+            <a:gsLst>
+              <a:gs pos="0">
+                <a:srgbClr val="0A1014"/>
+              </a:gs>
+              <a:gs pos="100000">
+                <a:srgbClr val="0E151C"/>
+              </a:gs>
+            </a:gsLst>
+            <a:lin ang="6900000" scaled="0"/>
+          </a:gradFill>
+          <a:ln>
+            <a:noFill/>
+          </a:ln>
+          <a:effectLst/>
+        </p:spPr>
+        <p:style>
+          <a:lnRef idx="1">
+            <a:schemeClr val="accent1"/>
+          </a:lnRef>
+          <a:fillRef idx="3">
+            <a:schemeClr val="accent1"/>
+          </a:fillRef>
+          <a:effectRef idx="2">
+            <a:schemeClr val="accent1"/>
+          </a:effectRef>
+          <a:fontRef idx="minor">
+            <a:schemeClr val="lt1"/>
+          </a:fontRef>
+        </p:style>
+        <p:txBody>
+          <a:bodyPr wrap="square" lIns="0" tIns="0" rIns="0" bIns="0" rtlCol="0" anchor="ctr"/>
+          <a:lstStyle/>
+          <a:p>
+            <a:pPr algn="ctr"/>
+          </a:p>
+        </p:txBody>
+      </p:sp>
+      <p:sp>
+        <p:nvSpPr>
+          <p:cNvPr id="3" name="Rectangle 2"/>
+          <p:cNvSpPr/>
+          <p:nvPr/>
+        </p:nvSpPr>
+        <p:spPr>
+          <a:xfrm>
+            <a:off x="318" y="0"/>
+            <a:ext cx="12191969" cy="32004"/>
+          </a:xfrm>
+          <a:prstGeom prst="rect">
+            <a:avLst/>
+          </a:prstGeom>
+          <a:solidFill>
+            <a:srgbClr val="B03A2E">
+              <a:alpha val="90000"/>
+            </a:srgbClr>
+          </a:solidFill>
+          <a:ln>
+            <a:noFill/>
+          </a:ln>
+          <a:effectLst/>
+        </p:spPr>
+        <p:style>
+          <a:lnRef idx="1">
+            <a:schemeClr val="accent1"/>
+          </a:lnRef>
+          <a:fillRef idx="3">
+            <a:schemeClr val="accent1"/>
+          </a:fillRef>
+          <a:effectRef idx="2">
+            <a:schemeClr val="accent1"/>
+          </a:effectRef>
+          <a:fontRef idx="minor">
+            <a:schemeClr val="lt1"/>
+          </a:fontRef>
+        </p:style>
+        <p:txBody>
+          <a:bodyPr wrap="square" lIns="0" tIns="0" rIns="0" bIns="0" rtlCol="0" anchor="ctr"/>
+          <a:lstStyle/>
+          <a:p>
+            <a:pPr algn="ctr"/>
+          </a:p>
+        </p:txBody>
+      </p:sp>
+      <p:sp>
+        <p:nvSpPr>
+          <p:cNvPr id="4" name="TextBox 3"/>
           <p:cNvSpPr txBox="1"/>
           <p:nvPr/>
         </p:nvSpPr>
         <p:spPr>
           <a:xfrm>
-            <a:off x="0" y="1016000"/>
-            <a:ext cx="12192000" cy="762000"/>
+            <a:off x="786701" y="658368"/>
+            <a:ext cx="6400800" cy="184150"/>
           </a:xfrm>
           <a:prstGeom prst="rect">
             <a:avLst/>
           </a:prstGeom>
           <a:noFill/>
-          <a:ln w="12700" cap="flat" cmpd="sng">
-            <a:noFill/>
-            <a:prstDash val="solid"/>
-            <a:round/>
-          </a:ln>
         </p:spPr>
         <p:txBody>
-          <a:bodyPr vert="horz" wrap="square" lIns="0" tIns="0" rIns="0" bIns="0" rtlCol="0" anchor="ctr" anchorCtr="0"/>
+          <a:bodyPr wrap="square" lIns="0" tIns="0" rIns="0" bIns="0" anchor="t">
+            <a:spAutoFit/>
+          </a:bodyPr>
           <a:lstStyle/>
           <a:p>
-            <a:pPr marL="0" indent="0" algn="ctr">
-              <a:lnSpc>
-                <a:spcPct val="125000"/>
-              </a:lnSpc>
-              <a:defRPr/>
-            </a:pPr>
+            <a:pPr algn="l"/>
             <a:r>
-              <a:rPr lang="en-US" sz="3200" b="1" i="0" u="none" strike="noStrike">
+              <a:rPr sz="1200" b="1" spc="260">
                 <a:solidFill>
-                  <a:srgbClr val="FFFFFF">
-                    <a:alpha val="90196"/>
-                  </a:srgbClr>
+                  <a:srgbClr val="B03A2E"/>
                 </a:solidFill>
-                <a:latin typeface="Noto Serif SC" panose="02020200000000000000" charset="-122"/>
-                <a:ea typeface="Noto Serif SC" panose="02020200000000000000" charset="-122"/>
-                <a:cs typeface="Noto Serif SC" panose="02020200000000000000" charset="-122"/>
-                <a:sym typeface="Noto Serif SC" panose="02020200000000000000" charset="-122"/>
+                <a:latin typeface="微软雅黑" panose="020B0503020204020204" charset="-122"/>
               </a:rPr>
-              <a:t>扫码签到 · 参与抽奖</a:t>
+              <a:t>LUCKY DRAW · 现场抽奖</a:t>
             </a:r>
-            <a:endParaRPr lang="en-US" sz="1100"/>
+            <a:endParaRPr sz="1200" b="1" spc="260">
+              <a:solidFill>
+                <a:srgbClr val="B03A2E"/>
+              </a:solidFill>
+              <a:latin typeface="微软雅黑" panose="020B0503020204020204" charset="-122"/>
+            </a:endParaRPr>
           </a:p>
         </p:txBody>
       </p:sp>
       <p:sp>
         <p:nvSpPr>
-          <p:cNvPr id="3" name="AutoShape 3"/>
+          <p:cNvPr id="5" name="TextBox 4"/>
           <p:cNvSpPr txBox="1"/>
           <p:nvPr/>
         </p:nvSpPr>
         <p:spPr>
           <a:xfrm>
-            <a:off x="0" y="1778000"/>
-            <a:ext cx="12192000" cy="381000"/>
+            <a:off x="786701" y="1005840"/>
+            <a:ext cx="7315200" cy="800100"/>
           </a:xfrm>
           <a:prstGeom prst="rect">
             <a:avLst/>
           </a:prstGeom>
           <a:noFill/>
-          <a:ln w="12700" cap="flat" cmpd="sng">
-            <a:noFill/>
-            <a:prstDash val="solid"/>
-            <a:round/>
-          </a:ln>
         </p:spPr>
         <p:txBody>
-          <a:bodyPr vert="horz" wrap="square" lIns="0" tIns="0" rIns="0" bIns="0" rtlCol="0" anchor="ctr" anchorCtr="0"/>
+          <a:bodyPr wrap="square" lIns="0" tIns="0" rIns="0" bIns="0" anchor="t">
+            <a:spAutoFit/>
+          </a:bodyPr>
           <a:lstStyle/>
           <a:p>
-            <a:pPr marL="0" indent="0" algn="ctr">
-              <a:lnSpc>
-                <a:spcPct val="125000"/>
-              </a:lnSpc>
-              <a:defRPr/>
+            <a:pPr algn="l">
+              <a:lnSpc>
+                <a:spcPct val="130000"/>
+              </a:lnSpc>
             </a:pPr>
             <a:r>
-              <a:rPr lang="en-US" sz="1600" b="0" i="0" u="none" strike="noStrike">
+              <a:rPr sz="4000" b="1" spc="150">
                 <a:solidFill>
-                  <a:srgbClr val="FFFFFF">
-                    <a:alpha val="50196"/>
-                  </a:srgbClr>
+                  <a:srgbClr val="E8E4DA"/>
+                </a:solidFill>
+                <a:latin typeface="思源宋体"/>
+              </a:rPr>
+              <a:t>扫一扫，参与抽奖</a:t>
+            </a:r>
+            <a:endParaRPr sz="4000" b="1" spc="150">
+              <a:solidFill>
+                <a:srgbClr val="E8E4DA"/>
+              </a:solidFill>
+              <a:latin typeface="思源宋体"/>
+            </a:endParaRPr>
+          </a:p>
+        </p:txBody>
+      </p:sp>
+      <p:sp>
+        <p:nvSpPr>
+          <p:cNvPr id="6" name="Rectangle 5"/>
+          <p:cNvSpPr/>
+          <p:nvPr/>
+        </p:nvSpPr>
+        <p:spPr>
+          <a:xfrm>
+            <a:off x="786702" y="1901952"/>
+            <a:ext cx="566928" cy="32004"/>
+          </a:xfrm>
+          <a:prstGeom prst="rect">
+            <a:avLst/>
+          </a:prstGeom>
+          <a:solidFill>
+            <a:srgbClr val="B03A2E"/>
+          </a:solidFill>
+          <a:ln>
+            <a:noFill/>
+          </a:ln>
+          <a:effectLst/>
+        </p:spPr>
+        <p:style>
+          <a:lnRef idx="1">
+            <a:schemeClr val="accent1"/>
+          </a:lnRef>
+          <a:fillRef idx="3">
+            <a:schemeClr val="accent1"/>
+          </a:fillRef>
+          <a:effectRef idx="2">
+            <a:schemeClr val="accent1"/>
+          </a:effectRef>
+          <a:fontRef idx="minor">
+            <a:schemeClr val="lt1"/>
+          </a:fontRef>
+        </p:style>
+        <p:txBody>
+          <a:bodyPr wrap="square" lIns="0" tIns="0" rIns="0" bIns="0" rtlCol="0" anchor="ctr"/>
+          <a:lstStyle/>
+          <a:p>
+            <a:pPr algn="ctr"/>
+          </a:p>
+        </p:txBody>
+      </p:sp>
+      <p:sp>
+        <p:nvSpPr>
+          <p:cNvPr id="7" name="Rounded Rectangle 6"/>
+          <p:cNvSpPr/>
+          <p:nvPr/>
+        </p:nvSpPr>
+        <p:spPr>
+          <a:xfrm>
+            <a:off x="786702" y="2240280"/>
+            <a:ext cx="2514600" cy="2514600"/>
+          </a:xfrm>
+          <a:prstGeom prst="roundRect">
+            <a:avLst>
+              <a:gd name="adj" fmla="val 4727"/>
+            </a:avLst>
+          </a:prstGeom>
+          <a:solidFill>
+            <a:srgbClr val="FFFFFF">
+              <a:alpha val="97000"/>
+            </a:srgbClr>
+          </a:solidFill>
+          <a:ln>
+            <a:noFill/>
+          </a:ln>
+          <a:effectLst/>
+        </p:spPr>
+        <p:style>
+          <a:lnRef idx="1">
+            <a:schemeClr val="accent1"/>
+          </a:lnRef>
+          <a:fillRef idx="3">
+            <a:schemeClr val="accent1"/>
+          </a:fillRef>
+          <a:effectRef idx="2">
+            <a:schemeClr val="accent1"/>
+          </a:effectRef>
+          <a:fontRef idx="minor">
+            <a:schemeClr val="lt1"/>
+          </a:fontRef>
+        </p:style>
+        <p:txBody>
+          <a:bodyPr wrap="square" lIns="0" tIns="0" rIns="0" bIns="0" rtlCol="0" anchor="ctr"/>
+          <a:lstStyle/>
+          <a:p>
+            <a:pPr algn="ctr"/>
+          </a:p>
+        </p:txBody>
+      </p:sp>
+      <p:sp>
+        <p:nvSpPr>
+          <p:cNvPr id="9" name="TextBox 8"/>
+          <p:cNvSpPr txBox="1"/>
+          <p:nvPr/>
+        </p:nvSpPr>
+        <p:spPr>
+          <a:xfrm>
+            <a:off x="786702" y="4864608"/>
+            <a:ext cx="2514600" cy="191770"/>
+          </a:xfrm>
+          <a:prstGeom prst="rect">
+            <a:avLst/>
+          </a:prstGeom>
+          <a:noFill/>
+        </p:spPr>
+        <p:txBody>
+          <a:bodyPr wrap="square" lIns="0" tIns="0" rIns="0" bIns="0" anchor="t">
+            <a:spAutoFit/>
+          </a:bodyPr>
+          <a:lstStyle/>
+          <a:p>
+            <a:pPr algn="ctr"/>
+            <a:r>
+              <a:rPr sz="1250" b="1">
+                <a:solidFill>
+                  <a:srgbClr val="E8E4DA"/>
                 </a:solidFill>
                 <a:latin typeface="微软雅黑" panose="020B0503020204020204" charset="-122"/>
-                <a:ea typeface="微软雅黑" panose="020B0503020204020204" charset="-122"/>
-                <a:cs typeface="微软雅黑" panose="020B0503020204020204" charset="-122"/>
-                <a:sym typeface="微软雅黑" panose="020B0503020204020204" charset="-122"/>
               </a:rPr>
-              <a:t>微信扫描下方二维码，输入姓名即可</a:t>
+              <a:t>微信扫码 · 填写姓名签到</a:t>
             </a:r>
-            <a:endParaRPr lang="en-US" sz="1100"/>
+            <a:endParaRPr sz="1250" b="1">
+              <a:solidFill>
+                <a:srgbClr val="E8E4DA"/>
+              </a:solidFill>
+              <a:latin typeface="微软雅黑" panose="020B0503020204020204" charset="-122"/>
+            </a:endParaRPr>
+          </a:p>
+        </p:txBody>
+      </p:sp>
+      <p:sp>
+        <p:nvSpPr>
+          <p:cNvPr id="10" name="TextBox 9"/>
+          <p:cNvSpPr txBox="1"/>
+          <p:nvPr/>
+        </p:nvSpPr>
+        <p:spPr>
+          <a:xfrm>
+            <a:off x="786702" y="5175504"/>
+            <a:ext cx="2514600" cy="168910"/>
+          </a:xfrm>
+          <a:prstGeom prst="rect">
+            <a:avLst/>
+          </a:prstGeom>
+          <a:noFill/>
+        </p:spPr>
+        <p:txBody>
+          <a:bodyPr wrap="square" lIns="0" tIns="0" rIns="0" bIns="0" anchor="t">
+            <a:spAutoFit/>
+          </a:bodyPr>
+          <a:lstStyle/>
+          <a:p>
+            <a:pPr algn="ctr"/>
+            <a:r>
+              <a:rPr sz="1100" b="0">
+                <a:solidFill>
+                  <a:srgbClr val="4A4E52"/>
+                </a:solidFill>
+                <a:latin typeface="微软雅黑" panose="020B0503020204020204" charset="-122"/>
+              </a:rPr>
+              <a:t>填完即参与抽奖</a:t>
+            </a:r>
+            <a:endParaRPr sz="1100" b="0">
+              <a:solidFill>
+                <a:srgbClr val="4A4E52"/>
+              </a:solidFill>
+              <a:latin typeface="微软雅黑" panose="020B0503020204020204" charset="-122"/>
+            </a:endParaRPr>
+          </a:p>
+        </p:txBody>
+      </p:sp>
+      <p:sp>
+        <p:nvSpPr>
+          <p:cNvPr id="11" name="TextBox 10"/>
+          <p:cNvSpPr txBox="1"/>
+          <p:nvPr/>
+        </p:nvSpPr>
+        <p:spPr>
+          <a:xfrm>
+            <a:off x="3612198" y="2240280"/>
+            <a:ext cx="3840480" cy="200025"/>
+          </a:xfrm>
+          <a:prstGeom prst="rect">
+            <a:avLst/>
+          </a:prstGeom>
+          <a:noFill/>
+        </p:spPr>
+        <p:txBody>
+          <a:bodyPr wrap="square" lIns="0" tIns="0" rIns="0" bIns="0" anchor="t">
+            <a:spAutoFit/>
+          </a:bodyPr>
+          <a:lstStyle/>
+          <a:p>
+            <a:pPr algn="l"/>
+            <a:r>
+              <a:rPr sz="1300" b="1" spc="150">
+                <a:solidFill>
+                  <a:srgbClr val="B03A2E"/>
+                </a:solidFill>
+                <a:latin typeface="微软雅黑" panose="020B0503020204020204" charset="-122"/>
+              </a:rPr>
+              <a:t>本场奖品</a:t>
+            </a:r>
+            <a:endParaRPr sz="1300" b="1" spc="150">
+              <a:solidFill>
+                <a:srgbClr val="B03A2E"/>
+              </a:solidFill>
+              <a:latin typeface="微软雅黑" panose="020B0503020204020204" charset="-122"/>
+            </a:endParaRPr>
+          </a:p>
+        </p:txBody>
+      </p:sp>
+      <p:sp>
+        <p:nvSpPr>
+          <p:cNvPr id="12" name="Rounded Rectangle 11"/>
+          <p:cNvSpPr/>
+          <p:nvPr/>
+        </p:nvSpPr>
+        <p:spPr>
+          <a:xfrm>
+            <a:off x="3612198" y="2615184"/>
+            <a:ext cx="5120640" cy="676656"/>
+          </a:xfrm>
+          <a:prstGeom prst="roundRect">
+            <a:avLst>
+              <a:gd name="adj" fmla="val 13513"/>
+            </a:avLst>
+          </a:prstGeom>
+          <a:solidFill>
+            <a:srgbClr val="FFFFFF">
+              <a:alpha val="5000"/>
+            </a:srgbClr>
+          </a:solidFill>
+          <a:ln w="10160">
+            <a:solidFill>
+              <a:srgbClr val="4A4E52">
+                <a:alpha val="35000"/>
+              </a:srgbClr>
+            </a:solidFill>
+          </a:ln>
+          <a:effectLst/>
+        </p:spPr>
+        <p:style>
+          <a:lnRef idx="1">
+            <a:schemeClr val="accent1"/>
+          </a:lnRef>
+          <a:fillRef idx="3">
+            <a:schemeClr val="accent1"/>
+          </a:fillRef>
+          <a:effectRef idx="2">
+            <a:schemeClr val="accent1"/>
+          </a:effectRef>
+          <a:fontRef idx="minor">
+            <a:schemeClr val="lt1"/>
+          </a:fontRef>
+        </p:style>
+        <p:txBody>
+          <a:bodyPr wrap="square" lIns="0" tIns="0" rIns="0" bIns="0" rtlCol="0" anchor="ctr"/>
+          <a:lstStyle/>
+          <a:p>
+            <a:pPr algn="ctr"/>
           </a:p>
         </p:txBody>
       </p:sp>
       <p:pic>
         <p:nvPicPr>
-          <p:cNvPr id="4" name="Picture 4"/>
+          <p:cNvPr id="13" name="Picture 12" descr="雨伞.jpg"/>
           <p:cNvPicPr>
             <a:picLocks noChangeAspect="1"/>
           </p:cNvPicPr>
@@ -12581,6 +12876,985 @@
         </p:nvPicPr>
         <p:blipFill>
           <a:blip r:embed="rId1"/>
+          <a:stretch>
+            <a:fillRect/>
+          </a:stretch>
+        </p:blipFill>
+        <p:spPr>
+          <a:xfrm>
+            <a:off x="3703638" y="2679191"/>
+            <a:ext cx="548640" cy="548640"/>
+          </a:xfrm>
+          <a:prstGeom prst="rect">
+            <a:avLst/>
+          </a:prstGeom>
+        </p:spPr>
+      </p:pic>
+      <p:sp>
+        <p:nvSpPr>
+          <p:cNvPr id="14" name="TextBox 13"/>
+          <p:cNvSpPr txBox="1"/>
+          <p:nvPr/>
+        </p:nvSpPr>
+        <p:spPr>
+          <a:xfrm>
+            <a:off x="4389438" y="2706624"/>
+            <a:ext cx="1371600" cy="222885"/>
+          </a:xfrm>
+          <a:prstGeom prst="rect">
+            <a:avLst/>
+          </a:prstGeom>
+          <a:noFill/>
+        </p:spPr>
+        <p:txBody>
+          <a:bodyPr wrap="square" lIns="0" tIns="0" rIns="0" bIns="0" anchor="t">
+            <a:spAutoFit/>
+          </a:bodyPr>
+          <a:lstStyle/>
+          <a:p>
+            <a:pPr algn="l"/>
+            <a:r>
+              <a:rPr sz="1450" b="1">
+                <a:solidFill>
+                  <a:srgbClr val="E8E4DA"/>
+                </a:solidFill>
+                <a:latin typeface="微软雅黑" panose="020B0503020204020204" charset="-122"/>
+              </a:rPr>
+              <a:t>雨伞</a:t>
+            </a:r>
+            <a:endParaRPr sz="1450" b="1">
+              <a:solidFill>
+                <a:srgbClr val="E8E4DA"/>
+              </a:solidFill>
+              <a:latin typeface="微软雅黑" panose="020B0503020204020204" charset="-122"/>
+            </a:endParaRPr>
+          </a:p>
+        </p:txBody>
+      </p:sp>
+      <p:sp>
+        <p:nvSpPr>
+          <p:cNvPr id="15" name="TextBox 14"/>
+          <p:cNvSpPr txBox="1"/>
+          <p:nvPr/>
+        </p:nvSpPr>
+        <p:spPr>
+          <a:xfrm>
+            <a:off x="4389438" y="2999232"/>
+            <a:ext cx="1371600" cy="153670"/>
+          </a:xfrm>
+          <a:prstGeom prst="rect">
+            <a:avLst/>
+          </a:prstGeom>
+          <a:noFill/>
+        </p:spPr>
+        <p:txBody>
+          <a:bodyPr wrap="square" lIns="0" tIns="0" rIns="0" bIns="0" anchor="t">
+            <a:spAutoFit/>
+          </a:bodyPr>
+          <a:lstStyle/>
+          <a:p>
+            <a:pPr algn="l"/>
+            <a:r>
+              <a:rPr sz="1000" b="0">
+                <a:solidFill>
+                  <a:srgbClr val="4A4E52"/>
+                </a:solidFill>
+                <a:latin typeface="微软雅黑" panose="020B0503020204020204" charset="-122"/>
+              </a:rPr>
+              <a:t>三等奖</a:t>
+            </a:r>
+            <a:endParaRPr sz="1000" b="0">
+              <a:solidFill>
+                <a:srgbClr val="4A4E52"/>
+              </a:solidFill>
+              <a:latin typeface="微软雅黑" panose="020B0503020204020204" charset="-122"/>
+            </a:endParaRPr>
+          </a:p>
+        </p:txBody>
+      </p:sp>
+      <p:sp>
+        <p:nvSpPr>
+          <p:cNvPr id="16" name="TextBox 15"/>
+          <p:cNvSpPr txBox="1"/>
+          <p:nvPr/>
+        </p:nvSpPr>
+        <p:spPr>
+          <a:xfrm>
+            <a:off x="5761038" y="2761488"/>
+            <a:ext cx="1097280" cy="338455"/>
+          </a:xfrm>
+          <a:prstGeom prst="rect">
+            <a:avLst/>
+          </a:prstGeom>
+          <a:noFill/>
+        </p:spPr>
+        <p:txBody>
+          <a:bodyPr wrap="square" lIns="0" tIns="0" rIns="0" bIns="0" anchor="t">
+            <a:spAutoFit/>
+          </a:bodyPr>
+          <a:lstStyle/>
+          <a:p>
+            <a:pPr algn="ctr"/>
+            <a:r>
+              <a:rPr sz="1200" b="0">
+                <a:solidFill>
+                  <a:srgbClr val="8C8A82"/>
+                </a:solidFill>
+                <a:latin typeface="微软雅黑" panose="020B0503020204020204" charset="-122"/>
+              </a:rPr>
+              <a:t>×</a:t>
+            </a:r>
+            <a:r>
+              <a:rPr sz="2200" b="1">
+                <a:solidFill>
+                  <a:srgbClr val="B03A2E"/>
+                </a:solidFill>
+                <a:latin typeface="Bahnschrift" panose="020B0502040204020203"/>
+              </a:rPr>
+              <a:t>1</a:t>
+            </a:r>
+            <a:endParaRPr sz="2200" b="1">
+              <a:solidFill>
+                <a:srgbClr val="B03A2E"/>
+              </a:solidFill>
+              <a:latin typeface="Bahnschrift" panose="020B0502040204020203"/>
+            </a:endParaRPr>
+          </a:p>
+        </p:txBody>
+      </p:sp>
+      <p:sp>
+        <p:nvSpPr>
+          <p:cNvPr id="17" name="Rounded Rectangle 16"/>
+          <p:cNvSpPr/>
+          <p:nvPr/>
+        </p:nvSpPr>
+        <p:spPr>
+          <a:xfrm>
+            <a:off x="3612198" y="3401568"/>
+            <a:ext cx="5120640" cy="676656"/>
+          </a:xfrm>
+          <a:prstGeom prst="roundRect">
+            <a:avLst>
+              <a:gd name="adj" fmla="val 13513"/>
+            </a:avLst>
+          </a:prstGeom>
+          <a:solidFill>
+            <a:srgbClr val="FFFFFF">
+              <a:alpha val="5000"/>
+            </a:srgbClr>
+          </a:solidFill>
+          <a:ln w="10160">
+            <a:solidFill>
+              <a:srgbClr val="4A4E52">
+                <a:alpha val="35000"/>
+              </a:srgbClr>
+            </a:solidFill>
+          </a:ln>
+          <a:effectLst/>
+        </p:spPr>
+        <p:style>
+          <a:lnRef idx="1">
+            <a:schemeClr val="accent1"/>
+          </a:lnRef>
+          <a:fillRef idx="3">
+            <a:schemeClr val="accent1"/>
+          </a:fillRef>
+          <a:effectRef idx="2">
+            <a:schemeClr val="accent1"/>
+          </a:effectRef>
+          <a:fontRef idx="minor">
+            <a:schemeClr val="lt1"/>
+          </a:fontRef>
+        </p:style>
+        <p:txBody>
+          <a:bodyPr wrap="square" lIns="0" tIns="0" rIns="0" bIns="0" rtlCol="0" anchor="ctr"/>
+          <a:lstStyle/>
+          <a:p>
+            <a:pPr algn="ctr"/>
+          </a:p>
+        </p:txBody>
+      </p:sp>
+      <p:pic>
+        <p:nvPicPr>
+          <p:cNvPr id="18" name="Picture 17" descr="帆布包.png"/>
+          <p:cNvPicPr>
+            <a:picLocks noChangeAspect="1"/>
+          </p:cNvPicPr>
+          <p:nvPr/>
+        </p:nvPicPr>
+        <p:blipFill>
+          <a:blip r:embed="rId2"/>
+          <a:stretch>
+            <a:fillRect/>
+          </a:stretch>
+        </p:blipFill>
+        <p:spPr>
+          <a:xfrm>
+            <a:off x="3703638" y="3465575"/>
+            <a:ext cx="548640" cy="548640"/>
+          </a:xfrm>
+          <a:prstGeom prst="rect">
+            <a:avLst/>
+          </a:prstGeom>
+        </p:spPr>
+      </p:pic>
+      <p:sp>
+        <p:nvSpPr>
+          <p:cNvPr id="19" name="TextBox 18"/>
+          <p:cNvSpPr txBox="1"/>
+          <p:nvPr/>
+        </p:nvSpPr>
+        <p:spPr>
+          <a:xfrm>
+            <a:off x="4389438" y="3493008"/>
+            <a:ext cx="1371600" cy="222885"/>
+          </a:xfrm>
+          <a:prstGeom prst="rect">
+            <a:avLst/>
+          </a:prstGeom>
+          <a:noFill/>
+        </p:spPr>
+        <p:txBody>
+          <a:bodyPr wrap="square" lIns="0" tIns="0" rIns="0" bIns="0" anchor="t">
+            <a:spAutoFit/>
+          </a:bodyPr>
+          <a:lstStyle/>
+          <a:p>
+            <a:pPr algn="l"/>
+            <a:r>
+              <a:rPr sz="1450" b="1">
+                <a:solidFill>
+                  <a:srgbClr val="E8E4DA"/>
+                </a:solidFill>
+                <a:latin typeface="微软雅黑" panose="020B0503020204020204" charset="-122"/>
+              </a:rPr>
+              <a:t>帆布袋</a:t>
+            </a:r>
+            <a:endParaRPr sz="1450" b="1">
+              <a:solidFill>
+                <a:srgbClr val="E8E4DA"/>
+              </a:solidFill>
+              <a:latin typeface="微软雅黑" panose="020B0503020204020204" charset="-122"/>
+            </a:endParaRPr>
+          </a:p>
+        </p:txBody>
+      </p:sp>
+      <p:sp>
+        <p:nvSpPr>
+          <p:cNvPr id="20" name="TextBox 19"/>
+          <p:cNvSpPr txBox="1"/>
+          <p:nvPr/>
+        </p:nvSpPr>
+        <p:spPr>
+          <a:xfrm>
+            <a:off x="4389438" y="3785615"/>
+            <a:ext cx="1371600" cy="153670"/>
+          </a:xfrm>
+          <a:prstGeom prst="rect">
+            <a:avLst/>
+          </a:prstGeom>
+          <a:noFill/>
+        </p:spPr>
+        <p:txBody>
+          <a:bodyPr wrap="square" lIns="0" tIns="0" rIns="0" bIns="0" anchor="t">
+            <a:spAutoFit/>
+          </a:bodyPr>
+          <a:lstStyle/>
+          <a:p>
+            <a:pPr algn="l"/>
+            <a:r>
+              <a:rPr sz="1000" b="0">
+                <a:solidFill>
+                  <a:srgbClr val="4A4E52"/>
+                </a:solidFill>
+                <a:latin typeface="微软雅黑" panose="020B0503020204020204" charset="-122"/>
+              </a:rPr>
+              <a:t>二等奖</a:t>
+            </a:r>
+            <a:endParaRPr sz="1000" b="0">
+              <a:solidFill>
+                <a:srgbClr val="4A4E52"/>
+              </a:solidFill>
+              <a:latin typeface="微软雅黑" panose="020B0503020204020204" charset="-122"/>
+            </a:endParaRPr>
+          </a:p>
+        </p:txBody>
+      </p:sp>
+      <p:sp>
+        <p:nvSpPr>
+          <p:cNvPr id="21" name="TextBox 20"/>
+          <p:cNvSpPr txBox="1"/>
+          <p:nvPr/>
+        </p:nvSpPr>
+        <p:spPr>
+          <a:xfrm>
+            <a:off x="5761038" y="3547872"/>
+            <a:ext cx="1097280" cy="338455"/>
+          </a:xfrm>
+          <a:prstGeom prst="rect">
+            <a:avLst/>
+          </a:prstGeom>
+          <a:noFill/>
+        </p:spPr>
+        <p:txBody>
+          <a:bodyPr wrap="square" lIns="0" tIns="0" rIns="0" bIns="0" anchor="t">
+            <a:spAutoFit/>
+          </a:bodyPr>
+          <a:lstStyle/>
+          <a:p>
+            <a:pPr algn="ctr"/>
+            <a:r>
+              <a:rPr sz="1200" b="0">
+                <a:solidFill>
+                  <a:srgbClr val="8C8A82"/>
+                </a:solidFill>
+                <a:latin typeface="微软雅黑" panose="020B0503020204020204" charset="-122"/>
+              </a:rPr>
+              <a:t>×</a:t>
+            </a:r>
+            <a:r>
+              <a:rPr sz="2200" b="1">
+                <a:solidFill>
+                  <a:srgbClr val="B03A2E"/>
+                </a:solidFill>
+                <a:latin typeface="Bahnschrift" panose="020B0502040204020203"/>
+              </a:rPr>
+              <a:t>3</a:t>
+            </a:r>
+            <a:endParaRPr sz="2200" b="1">
+              <a:solidFill>
+                <a:srgbClr val="B03A2E"/>
+              </a:solidFill>
+              <a:latin typeface="Bahnschrift" panose="020B0502040204020203"/>
+            </a:endParaRPr>
+          </a:p>
+        </p:txBody>
+      </p:sp>
+      <p:sp>
+        <p:nvSpPr>
+          <p:cNvPr id="22" name="Rounded Rectangle 21"/>
+          <p:cNvSpPr/>
+          <p:nvPr/>
+        </p:nvSpPr>
+        <p:spPr>
+          <a:xfrm>
+            <a:off x="3612198" y="4187952"/>
+            <a:ext cx="5120640" cy="676656"/>
+          </a:xfrm>
+          <a:prstGeom prst="roundRect">
+            <a:avLst>
+              <a:gd name="adj" fmla="val 13513"/>
+            </a:avLst>
+          </a:prstGeom>
+          <a:solidFill>
+            <a:srgbClr val="FFFFFF">
+              <a:alpha val="5000"/>
+            </a:srgbClr>
+          </a:solidFill>
+          <a:ln w="10160">
+            <a:solidFill>
+              <a:srgbClr val="4A4E52">
+                <a:alpha val="35000"/>
+              </a:srgbClr>
+            </a:solidFill>
+          </a:ln>
+          <a:effectLst/>
+        </p:spPr>
+        <p:style>
+          <a:lnRef idx="1">
+            <a:schemeClr val="accent1"/>
+          </a:lnRef>
+          <a:fillRef idx="3">
+            <a:schemeClr val="accent1"/>
+          </a:fillRef>
+          <a:effectRef idx="2">
+            <a:schemeClr val="accent1"/>
+          </a:effectRef>
+          <a:fontRef idx="minor">
+            <a:schemeClr val="lt1"/>
+          </a:fontRef>
+        </p:style>
+        <p:txBody>
+          <a:bodyPr wrap="square" lIns="0" tIns="0" rIns="0" bIns="0" rtlCol="0" anchor="ctr"/>
+          <a:lstStyle/>
+          <a:p>
+            <a:pPr algn="ctr"/>
+          </a:p>
+        </p:txBody>
+      </p:sp>
+      <p:pic>
+        <p:nvPicPr>
+          <p:cNvPr id="23" name="Picture 22" descr="钥匙扣.png"/>
+          <p:cNvPicPr>
+            <a:picLocks noChangeAspect="1"/>
+          </p:cNvPicPr>
+          <p:nvPr/>
+        </p:nvPicPr>
+        <p:blipFill>
+          <a:blip r:embed="rId3"/>
+          <a:stretch>
+            <a:fillRect/>
+          </a:stretch>
+        </p:blipFill>
+        <p:spPr>
+          <a:xfrm>
+            <a:off x="3703638" y="4251960"/>
+            <a:ext cx="548640" cy="548640"/>
+          </a:xfrm>
+          <a:prstGeom prst="rect">
+            <a:avLst/>
+          </a:prstGeom>
+        </p:spPr>
+      </p:pic>
+      <p:sp>
+        <p:nvSpPr>
+          <p:cNvPr id="24" name="TextBox 23"/>
+          <p:cNvSpPr txBox="1"/>
+          <p:nvPr/>
+        </p:nvSpPr>
+        <p:spPr>
+          <a:xfrm>
+            <a:off x="4389438" y="4279392"/>
+            <a:ext cx="1371600" cy="222885"/>
+          </a:xfrm>
+          <a:prstGeom prst="rect">
+            <a:avLst/>
+          </a:prstGeom>
+          <a:noFill/>
+        </p:spPr>
+        <p:txBody>
+          <a:bodyPr wrap="square" lIns="0" tIns="0" rIns="0" bIns="0" anchor="t">
+            <a:spAutoFit/>
+          </a:bodyPr>
+          <a:lstStyle/>
+          <a:p>
+            <a:pPr algn="l"/>
+            <a:r>
+              <a:rPr sz="1450" b="1">
+                <a:solidFill>
+                  <a:srgbClr val="E8E4DA"/>
+                </a:solidFill>
+                <a:latin typeface="微软雅黑" panose="020B0503020204020204" charset="-122"/>
+              </a:rPr>
+              <a:t>钥匙扣</a:t>
+            </a:r>
+            <a:endParaRPr sz="1450" b="1">
+              <a:solidFill>
+                <a:srgbClr val="E8E4DA"/>
+              </a:solidFill>
+              <a:latin typeface="微软雅黑" panose="020B0503020204020204" charset="-122"/>
+            </a:endParaRPr>
+          </a:p>
+        </p:txBody>
+      </p:sp>
+      <p:sp>
+        <p:nvSpPr>
+          <p:cNvPr id="25" name="TextBox 24"/>
+          <p:cNvSpPr txBox="1"/>
+          <p:nvPr/>
+        </p:nvSpPr>
+        <p:spPr>
+          <a:xfrm>
+            <a:off x="4389438" y="4572000"/>
+            <a:ext cx="1371600" cy="153670"/>
+          </a:xfrm>
+          <a:prstGeom prst="rect">
+            <a:avLst/>
+          </a:prstGeom>
+          <a:noFill/>
+        </p:spPr>
+        <p:txBody>
+          <a:bodyPr wrap="square" lIns="0" tIns="0" rIns="0" bIns="0" anchor="t">
+            <a:spAutoFit/>
+          </a:bodyPr>
+          <a:lstStyle/>
+          <a:p>
+            <a:pPr algn="l"/>
+            <a:r>
+              <a:rPr sz="1000" b="0">
+                <a:solidFill>
+                  <a:srgbClr val="4A4E52"/>
+                </a:solidFill>
+                <a:latin typeface="微软雅黑" panose="020B0503020204020204" charset="-122"/>
+              </a:rPr>
+              <a:t>一等奖</a:t>
+            </a:r>
+            <a:endParaRPr sz="1000" b="0">
+              <a:solidFill>
+                <a:srgbClr val="4A4E52"/>
+              </a:solidFill>
+              <a:latin typeface="微软雅黑" panose="020B0503020204020204" charset="-122"/>
+            </a:endParaRPr>
+          </a:p>
+        </p:txBody>
+      </p:sp>
+      <p:sp>
+        <p:nvSpPr>
+          <p:cNvPr id="26" name="TextBox 25"/>
+          <p:cNvSpPr txBox="1"/>
+          <p:nvPr/>
+        </p:nvSpPr>
+        <p:spPr>
+          <a:xfrm>
+            <a:off x="5761038" y="4334256"/>
+            <a:ext cx="1097280" cy="338455"/>
+          </a:xfrm>
+          <a:prstGeom prst="rect">
+            <a:avLst/>
+          </a:prstGeom>
+          <a:noFill/>
+        </p:spPr>
+        <p:txBody>
+          <a:bodyPr wrap="square" lIns="0" tIns="0" rIns="0" bIns="0" anchor="t">
+            <a:spAutoFit/>
+          </a:bodyPr>
+          <a:lstStyle/>
+          <a:p>
+            <a:pPr algn="ctr"/>
+            <a:r>
+              <a:rPr sz="1200" b="0">
+                <a:solidFill>
+                  <a:srgbClr val="8C8A82"/>
+                </a:solidFill>
+                <a:latin typeface="微软雅黑" panose="020B0503020204020204" charset="-122"/>
+              </a:rPr>
+              <a:t>×</a:t>
+            </a:r>
+            <a:r>
+              <a:rPr sz="2200" b="1">
+                <a:solidFill>
+                  <a:srgbClr val="B03A2E"/>
+                </a:solidFill>
+                <a:latin typeface="Bahnschrift" panose="020B0502040204020203"/>
+              </a:rPr>
+              <a:t>5</a:t>
+            </a:r>
+            <a:endParaRPr sz="2200" b="1">
+              <a:solidFill>
+                <a:srgbClr val="B03A2E"/>
+              </a:solidFill>
+              <a:latin typeface="Bahnschrift" panose="020B0502040204020203"/>
+            </a:endParaRPr>
+          </a:p>
+        </p:txBody>
+      </p:sp>
+      <p:sp>
+        <p:nvSpPr>
+          <p:cNvPr id="27" name="Rounded Rectangle 26"/>
+          <p:cNvSpPr/>
+          <p:nvPr/>
+        </p:nvSpPr>
+        <p:spPr>
+          <a:xfrm>
+            <a:off x="3612198" y="4974336"/>
+            <a:ext cx="5120640" cy="676656"/>
+          </a:xfrm>
+          <a:prstGeom prst="roundRect">
+            <a:avLst>
+              <a:gd name="adj" fmla="val 13513"/>
+            </a:avLst>
+          </a:prstGeom>
+          <a:solidFill>
+            <a:srgbClr val="FFFFFF">
+              <a:alpha val="5000"/>
+            </a:srgbClr>
+          </a:solidFill>
+          <a:ln w="10160">
+            <a:solidFill>
+              <a:srgbClr val="4A4E52">
+                <a:alpha val="35000"/>
+              </a:srgbClr>
+            </a:solidFill>
+          </a:ln>
+          <a:effectLst/>
+        </p:spPr>
+        <p:style>
+          <a:lnRef idx="1">
+            <a:schemeClr val="accent1"/>
+          </a:lnRef>
+          <a:fillRef idx="3">
+            <a:schemeClr val="accent1"/>
+          </a:fillRef>
+          <a:effectRef idx="2">
+            <a:schemeClr val="accent1"/>
+          </a:effectRef>
+          <a:fontRef idx="minor">
+            <a:schemeClr val="lt1"/>
+          </a:fontRef>
+        </p:style>
+        <p:txBody>
+          <a:bodyPr wrap="square" lIns="0" tIns="0" rIns="0" bIns="0" rtlCol="0" anchor="ctr"/>
+          <a:lstStyle/>
+          <a:p>
+            <a:pPr algn="ctr"/>
+          </a:p>
+        </p:txBody>
+      </p:sp>
+      <p:pic>
+        <p:nvPicPr>
+          <p:cNvPr id="28" name="Picture 27" descr="保温杯.png"/>
+          <p:cNvPicPr>
+            <a:picLocks noChangeAspect="1"/>
+          </p:cNvPicPr>
+          <p:nvPr/>
+        </p:nvPicPr>
+        <p:blipFill>
+          <a:blip r:embed="rId4"/>
+          <a:stretch>
+            <a:fillRect/>
+          </a:stretch>
+        </p:blipFill>
+        <p:spPr>
+          <a:xfrm>
+            <a:off x="3703638" y="5038344"/>
+            <a:ext cx="548640" cy="548640"/>
+          </a:xfrm>
+          <a:prstGeom prst="rect">
+            <a:avLst/>
+          </a:prstGeom>
+        </p:spPr>
+      </p:pic>
+      <p:sp>
+        <p:nvSpPr>
+          <p:cNvPr id="29" name="TextBox 28"/>
+          <p:cNvSpPr txBox="1"/>
+          <p:nvPr/>
+        </p:nvSpPr>
+        <p:spPr>
+          <a:xfrm>
+            <a:off x="4389438" y="5065775"/>
+            <a:ext cx="1371600" cy="222885"/>
+          </a:xfrm>
+          <a:prstGeom prst="rect">
+            <a:avLst/>
+          </a:prstGeom>
+          <a:noFill/>
+        </p:spPr>
+        <p:txBody>
+          <a:bodyPr wrap="square" lIns="0" tIns="0" rIns="0" bIns="0" anchor="t">
+            <a:spAutoFit/>
+          </a:bodyPr>
+          <a:lstStyle/>
+          <a:p>
+            <a:pPr algn="l"/>
+            <a:r>
+              <a:rPr sz="1450" b="1">
+                <a:solidFill>
+                  <a:srgbClr val="E8E4DA"/>
+                </a:solidFill>
+                <a:latin typeface="微软雅黑" panose="020B0503020204020204" charset="-122"/>
+              </a:rPr>
+              <a:t>贴纸</a:t>
+            </a:r>
+            <a:endParaRPr sz="1450" b="1">
+              <a:solidFill>
+                <a:srgbClr val="E8E4DA"/>
+              </a:solidFill>
+              <a:latin typeface="微软雅黑" panose="020B0503020204020204" charset="-122"/>
+            </a:endParaRPr>
+          </a:p>
+        </p:txBody>
+      </p:sp>
+      <p:sp>
+        <p:nvSpPr>
+          <p:cNvPr id="30" name="TextBox 29"/>
+          <p:cNvSpPr txBox="1"/>
+          <p:nvPr/>
+        </p:nvSpPr>
+        <p:spPr>
+          <a:xfrm>
+            <a:off x="4389438" y="5358383"/>
+            <a:ext cx="1371600" cy="153670"/>
+          </a:xfrm>
+          <a:prstGeom prst="rect">
+            <a:avLst/>
+          </a:prstGeom>
+          <a:noFill/>
+        </p:spPr>
+        <p:txBody>
+          <a:bodyPr wrap="square" lIns="0" tIns="0" rIns="0" bIns="0" anchor="t">
+            <a:spAutoFit/>
+          </a:bodyPr>
+          <a:lstStyle/>
+          <a:p>
+            <a:pPr algn="l"/>
+            <a:r>
+              <a:rPr sz="1000" b="0">
+                <a:solidFill>
+                  <a:srgbClr val="4A4E52"/>
+                </a:solidFill>
+                <a:latin typeface="微软雅黑" panose="020B0503020204020204" charset="-122"/>
+              </a:rPr>
+              <a:t>参与奖</a:t>
+            </a:r>
+            <a:endParaRPr sz="1000" b="0">
+              <a:solidFill>
+                <a:srgbClr val="4A4E52"/>
+              </a:solidFill>
+              <a:latin typeface="微软雅黑" panose="020B0503020204020204" charset="-122"/>
+            </a:endParaRPr>
+          </a:p>
+        </p:txBody>
+      </p:sp>
+      <p:sp>
+        <p:nvSpPr>
+          <p:cNvPr id="31" name="TextBox 30"/>
+          <p:cNvSpPr txBox="1"/>
+          <p:nvPr/>
+        </p:nvSpPr>
+        <p:spPr>
+          <a:xfrm>
+            <a:off x="5761038" y="5120640"/>
+            <a:ext cx="1097280" cy="338455"/>
+          </a:xfrm>
+          <a:prstGeom prst="rect">
+            <a:avLst/>
+          </a:prstGeom>
+          <a:noFill/>
+        </p:spPr>
+        <p:txBody>
+          <a:bodyPr wrap="square" lIns="0" tIns="0" rIns="0" bIns="0" anchor="t">
+            <a:spAutoFit/>
+          </a:bodyPr>
+          <a:lstStyle/>
+          <a:p>
+            <a:pPr algn="ctr"/>
+            <a:r>
+              <a:rPr sz="1200" b="0">
+                <a:solidFill>
+                  <a:srgbClr val="8C8A82"/>
+                </a:solidFill>
+                <a:latin typeface="微软雅黑" panose="020B0503020204020204" charset="-122"/>
+              </a:rPr>
+              <a:t>×</a:t>
+            </a:r>
+            <a:r>
+              <a:rPr sz="2200" b="1">
+                <a:solidFill>
+                  <a:srgbClr val="B03A2E"/>
+                </a:solidFill>
+                <a:latin typeface="Bahnschrift" panose="020B0502040204020203"/>
+              </a:rPr>
+              <a:t>5</a:t>
+            </a:r>
+            <a:endParaRPr sz="2200" b="1">
+              <a:solidFill>
+                <a:srgbClr val="B03A2E"/>
+              </a:solidFill>
+              <a:latin typeface="Bahnschrift" panose="020B0502040204020203"/>
+            </a:endParaRPr>
+          </a:p>
+        </p:txBody>
+      </p:sp>
+      <p:sp>
+        <p:nvSpPr>
+          <p:cNvPr id="32" name="Rounded Rectangle 31"/>
+          <p:cNvSpPr/>
+          <p:nvPr/>
+        </p:nvSpPr>
+        <p:spPr>
+          <a:xfrm>
+            <a:off x="8915718" y="2240280"/>
+            <a:ext cx="2487168" cy="3310128"/>
+          </a:xfrm>
+          <a:prstGeom prst="roundRect">
+            <a:avLst>
+              <a:gd name="adj" fmla="val 4779"/>
+            </a:avLst>
+          </a:prstGeom>
+          <a:solidFill>
+            <a:srgbClr val="FFFFFF">
+              <a:alpha val="6000"/>
+            </a:srgbClr>
+          </a:solidFill>
+          <a:ln w="12700">
+            <a:solidFill>
+              <a:srgbClr val="B03A2E">
+                <a:alpha val="30000"/>
+              </a:srgbClr>
+            </a:solidFill>
+          </a:ln>
+          <a:effectLst/>
+        </p:spPr>
+        <p:style>
+          <a:lnRef idx="1">
+            <a:schemeClr val="accent1"/>
+          </a:lnRef>
+          <a:fillRef idx="3">
+            <a:schemeClr val="accent1"/>
+          </a:fillRef>
+          <a:effectRef idx="2">
+            <a:schemeClr val="accent1"/>
+          </a:effectRef>
+          <a:fontRef idx="minor">
+            <a:schemeClr val="lt1"/>
+          </a:fontRef>
+        </p:style>
+        <p:txBody>
+          <a:bodyPr wrap="square" lIns="0" tIns="0" rIns="0" bIns="0" rtlCol="0" anchor="ctr"/>
+          <a:lstStyle/>
+          <a:p>
+            <a:pPr algn="ctr"/>
+          </a:p>
+        </p:txBody>
+      </p:sp>
+      <p:pic>
+        <p:nvPicPr>
+          <p:cNvPr id="33" name="Picture 32" descr="雨伞.jpg"/>
+          <p:cNvPicPr>
+            <a:picLocks noChangeAspect="1"/>
+          </p:cNvPicPr>
+          <p:nvPr/>
+        </p:nvPicPr>
+        <p:blipFill>
+          <a:blip r:embed="rId1"/>
+          <a:stretch>
+            <a:fillRect/>
+          </a:stretch>
+        </p:blipFill>
+        <p:spPr>
+          <a:xfrm>
+            <a:off x="9071166" y="2432304"/>
+            <a:ext cx="2176272" cy="2176272"/>
+          </a:xfrm>
+          <a:prstGeom prst="rect">
+            <a:avLst/>
+          </a:prstGeom>
+        </p:spPr>
+      </p:pic>
+      <p:sp>
+        <p:nvSpPr>
+          <p:cNvPr id="34" name="TextBox 33"/>
+          <p:cNvSpPr txBox="1"/>
+          <p:nvPr/>
+        </p:nvSpPr>
+        <p:spPr>
+          <a:xfrm>
+            <a:off x="8915718" y="4754880"/>
+            <a:ext cx="2487168" cy="200025"/>
+          </a:xfrm>
+          <a:prstGeom prst="rect">
+            <a:avLst/>
+          </a:prstGeom>
+          <a:noFill/>
+        </p:spPr>
+        <p:txBody>
+          <a:bodyPr wrap="square" lIns="0" tIns="0" rIns="0" bIns="0" anchor="t">
+            <a:spAutoFit/>
+          </a:bodyPr>
+          <a:lstStyle/>
+          <a:p>
+            <a:pPr algn="ctr"/>
+            <a:r>
+              <a:rPr sz="1300" b="1">
+                <a:solidFill>
+                  <a:srgbClr val="B03A2E"/>
+                </a:solidFill>
+                <a:latin typeface="微软雅黑" panose="020B0503020204020204" charset="-122"/>
+              </a:rPr>
+              <a:t>特等奖 · 雨伞</a:t>
+            </a:r>
+            <a:endParaRPr sz="1300" b="1">
+              <a:solidFill>
+                <a:srgbClr val="B03A2E"/>
+              </a:solidFill>
+              <a:latin typeface="微软雅黑" panose="020B0503020204020204" charset="-122"/>
+            </a:endParaRPr>
+          </a:p>
+        </p:txBody>
+      </p:sp>
+      <p:sp>
+        <p:nvSpPr>
+          <p:cNvPr id="35" name="TextBox 34"/>
+          <p:cNvSpPr txBox="1"/>
+          <p:nvPr/>
+        </p:nvSpPr>
+        <p:spPr>
+          <a:xfrm>
+            <a:off x="8915718" y="5084064"/>
+            <a:ext cx="2487168" cy="168910"/>
+          </a:xfrm>
+          <a:prstGeom prst="rect">
+            <a:avLst/>
+          </a:prstGeom>
+          <a:noFill/>
+        </p:spPr>
+        <p:txBody>
+          <a:bodyPr wrap="square" lIns="0" tIns="0" rIns="0" bIns="0" anchor="t">
+            <a:spAutoFit/>
+          </a:bodyPr>
+          <a:lstStyle/>
+          <a:p>
+            <a:pPr algn="ctr"/>
+            <a:r>
+              <a:rPr sz="1100" b="0">
+                <a:solidFill>
+                  <a:srgbClr val="8C8A82"/>
+                </a:solidFill>
+                <a:latin typeface="微软雅黑" panose="020B0503020204020204" charset="-122"/>
+              </a:rPr>
+              <a:t>共 1 把</a:t>
+            </a:r>
+            <a:endParaRPr sz="1100" b="0">
+              <a:solidFill>
+                <a:srgbClr val="8C8A82"/>
+              </a:solidFill>
+              <a:latin typeface="微软雅黑" panose="020B0503020204020204" charset="-122"/>
+            </a:endParaRPr>
+          </a:p>
+        </p:txBody>
+      </p:sp>
+      <p:sp>
+        <p:nvSpPr>
+          <p:cNvPr id="36" name="TextBox 35"/>
+          <p:cNvSpPr txBox="1"/>
+          <p:nvPr/>
+        </p:nvSpPr>
+        <p:spPr>
+          <a:xfrm>
+            <a:off x="786701" y="5870448"/>
+            <a:ext cx="10607040" cy="184150"/>
+          </a:xfrm>
+          <a:prstGeom prst="rect">
+            <a:avLst/>
+          </a:prstGeom>
+          <a:noFill/>
+        </p:spPr>
+        <p:txBody>
+          <a:bodyPr wrap="square" lIns="0" tIns="0" rIns="0" bIns="0" anchor="t">
+            <a:spAutoFit/>
+          </a:bodyPr>
+          <a:lstStyle/>
+          <a:p>
+            <a:pPr algn="l"/>
+            <a:r>
+              <a:rPr sz="1200" b="0">
+                <a:solidFill>
+                  <a:srgbClr val="8C8A82"/>
+                </a:solidFill>
+                <a:latin typeface="微软雅黑" panose="020B0503020204020204" charset="-122"/>
+              </a:rPr>
+              <a:t>奖品由「一生一芯」项目组提供  ·  按到场人数比例发放  ·  中奖名单稍后公布</a:t>
+            </a:r>
+            <a:endParaRPr sz="1200" b="0">
+              <a:solidFill>
+                <a:srgbClr val="8C8A82"/>
+              </a:solidFill>
+              <a:latin typeface="微软雅黑" panose="020B0503020204020204" charset="-122"/>
+            </a:endParaRPr>
+          </a:p>
+        </p:txBody>
+      </p:sp>
+      <p:pic>
+        <p:nvPicPr>
+          <p:cNvPr id="37" name="Picture 4"/>
+          <p:cNvPicPr>
+            <a:picLocks noChangeAspect="1"/>
+          </p:cNvPicPr>
+          <p:nvPr/>
+        </p:nvPicPr>
+        <p:blipFill>
+          <a:blip r:embed="rId5"/>
           <a:srcRect/>
           <a:stretch>
             <a:fillRect/>
@@ -12588,7 +13862,7 @@
         </p:blipFill>
         <p:spPr>
           <a:xfrm>
-            <a:off x="4826000" y="2413000"/>
+            <a:off x="761048" y="2254250"/>
             <a:ext cx="2540000" cy="2540000"/>
           </a:xfrm>
           <a:prstGeom prst="rect">
@@ -12602,60 +13876,14 @@
           </a:ln>
         </p:spPr>
       </p:pic>
-      <p:sp>
-        <p:nvSpPr>
-          <p:cNvPr id="5" name="AutoShape 5"/>
-          <p:cNvSpPr txBox="1"/>
-          <p:nvPr/>
-        </p:nvSpPr>
-        <p:spPr>
-          <a:xfrm>
-            <a:off x="0" y="5207000"/>
-            <a:ext cx="12192000" cy="381000"/>
-          </a:xfrm>
-          <a:prstGeom prst="rect">
-            <a:avLst/>
-          </a:prstGeom>
-          <a:noFill/>
-          <a:ln w="12700" cap="flat" cmpd="sng">
-            <a:noFill/>
-            <a:prstDash val="solid"/>
-            <a:round/>
-          </a:ln>
-        </p:spPr>
-        <p:txBody>
-          <a:bodyPr vert="horz" wrap="square" lIns="0" tIns="0" rIns="0" bIns="0" rtlCol="0" anchor="ctr" anchorCtr="0"/>
-          <a:lstStyle/>
-          <a:p>
-            <a:pPr marL="0" indent="0" algn="ctr">
-              <a:lnSpc>
-                <a:spcPct val="125000"/>
-              </a:lnSpc>
-              <a:defRPr/>
-            </a:pPr>
-            <a:r>
-              <a:rPr lang="en-US" sz="1400" b="0" i="0" u="none" strike="noStrike">
-                <a:solidFill>
-                  <a:srgbClr val="FFFFFF">
-                    <a:alpha val="40000"/>
-                  </a:srgbClr>
-                </a:solidFill>
-                <a:latin typeface="微软雅黑" panose="020B0503020204020204" charset="-122"/>
-                <a:ea typeface="微软雅黑" panose="020B0503020204020204" charset="-122"/>
-                <a:cs typeface="微软雅黑" panose="020B0503020204020204" charset="-122"/>
-                <a:sym typeface="微软雅黑" panose="020B0503020204020204" charset="-122"/>
-              </a:rPr>
-              <a:t>签到后请在座位上等待抽奖环节</a:t>
-            </a:r>
-            <a:endParaRPr lang="en-US" sz="1100"/>
-          </a:p>
-        </p:txBody>
-      </p:sp>
     </p:spTree>
   </p:cSld>
   <p:clrMapOvr>
     <a:masterClrMapping/>
   </p:clrMapOvr>
+  <p:transition spd="slow" advClick="0" advTm="20000">
+    <p:fade/>
+  </p:transition>
 </p:sld>
 </file>
 
